--- a/Aula09_Limites_da_Computacao/Aula09_Teoria.pptx
+++ b/Aula09_Limites_da_Computacao/Aula09_Teoria.pptx
@@ -2409,6 +2409,10 @@
           </a:solidFill>
           <a:ln/>
         </p:spPr>
+        <p:txBody>
+          <a:bodyPr/>
+          <a:p/>
+        </p:txBody>
       </p:sp>
       <p:sp>
         <p:nvSpPr>
@@ -2431,6 +2435,10 @@
           </a:solidFill>
           <a:ln/>
         </p:spPr>
+        <p:txBody>
+          <a:bodyPr/>
+          <a:p/>
+        </p:txBody>
       </p:sp>
       <p:sp>
         <p:nvSpPr>
@@ -2451,6 +2459,10 @@
           </a:solidFill>
           <a:ln/>
         </p:spPr>
+        <p:txBody>
+          <a:bodyPr/>
+          <a:p/>
+        </p:txBody>
       </p:sp>
       <p:pic>
         <p:nvPicPr>
@@ -2764,6 +2776,10 @@
           </a:solidFill>
           <a:ln/>
         </p:spPr>
+        <p:txBody>
+          <a:bodyPr/>
+          <a:p/>
+        </p:txBody>
       </p:sp>
       <p:sp>
         <p:nvSpPr>
@@ -3002,6 +3018,10 @@
           </a:solidFill>
           <a:ln/>
         </p:spPr>
+        <p:txBody>
+          <a:bodyPr/>
+          <a:p/>
+        </p:txBody>
       </p:sp>
       <p:sp>
         <p:nvSpPr>
@@ -3417,6 +3437,10 @@
           </a:solidFill>
           <a:ln/>
         </p:spPr>
+        <p:txBody>
+          <a:bodyPr/>
+          <a:p/>
+        </p:txBody>
       </p:sp>
       <p:sp>
         <p:nvSpPr>
@@ -3521,7 +3545,7 @@
                 <a:ea typeface="Calibri" pitchFamily="34" charset="-122"/>
                 <a:cs typeface="Calibri" pitchFamily="34" charset="-120"/>
               </a:rPr>
-              <a:t>Relato: reconhecer limites da ferramenta e do modelo.</a:t>
+              <a:t>Reconhecer limites da ferramenta e do modelo.</a:t>
             </a:r>
             <a:endParaRPr lang="en-US" sz="1100" dirty="0"/>
           </a:p>
@@ -3545,7 +3569,7 @@
                 <a:ea typeface="Calibri" pitchFamily="34" charset="-122"/>
                 <a:cs typeface="Calibri" pitchFamily="34" charset="-120"/>
               </a:rPr>
-              <a:t>Queiroz: o resultado final não esgota a aprendizagem do conceito.</a:t>
+              <a:t>O resultado final não esgota a aprendizagem do conceito.</a:t>
             </a:r>
             <a:endParaRPr lang="en-US" sz="1100" dirty="0"/>
           </a:p>
@@ -3569,7 +3593,7 @@
                 <a:ea typeface="Calibri" pitchFamily="34" charset="-122"/>
                 <a:cs typeface="Calibri" pitchFamily="34" charset="-120"/>
               </a:rPr>
-              <a:t>Wessels: o contexto e o tipo de dado influenciam a representação escolhida.</a:t>
+              <a:t>O contexto e o tipo de dado influenciam a representação escolhida.</a:t>
             </a:r>
             <a:endParaRPr lang="en-US" sz="1100" dirty="0"/>
           </a:p>
@@ -3596,6 +3620,10 @@
           </a:solidFill>
           <a:ln/>
         </p:spPr>
+        <p:txBody>
+          <a:bodyPr/>
+          <a:p/>
+        </p:txBody>
       </p:sp>
       <p:sp>
         <p:nvSpPr>
@@ -3888,6 +3916,10 @@
           </a:solidFill>
           <a:ln/>
         </p:spPr>
+        <p:txBody>
+          <a:bodyPr/>
+          <a:p/>
+        </p:txBody>
       </p:sp>
       <p:sp>
         <p:nvSpPr>
@@ -4126,6 +4158,10 @@
           </a:solidFill>
           <a:ln/>
         </p:spPr>
+        <p:txBody>
+          <a:bodyPr/>
+          <a:p/>
+        </p:txBody>
       </p:sp>
       <p:sp>
         <p:nvSpPr>
@@ -4609,6 +4645,10 @@
           </a:solidFill>
           <a:ln/>
         </p:spPr>
+        <p:txBody>
+          <a:bodyPr/>
+          <a:p/>
+        </p:txBody>
       </p:sp>
       <p:sp>
         <p:nvSpPr>
@@ -4713,7 +4753,7 @@
                 <a:ea typeface="Calibri" pitchFamily="34" charset="-122"/>
                 <a:cs typeface="Calibri" pitchFamily="34" charset="-120"/>
               </a:rPr>
-              <a:t>Relato: reconhecer limites da ferramenta e do modelo.</a:t>
+              <a:t>Reconhecer limites da ferramenta e do modelo.</a:t>
             </a:r>
             <a:endParaRPr lang="en-US" sz="1100" dirty="0"/>
           </a:p>
@@ -4737,7 +4777,7 @@
                 <a:ea typeface="Calibri" pitchFamily="34" charset="-122"/>
                 <a:cs typeface="Calibri" pitchFamily="34" charset="-120"/>
               </a:rPr>
-              <a:t>Queiroz: o percurso da tarefa revela mudanças no discurso e na ação.</a:t>
+              <a:t>O percurso da tarefa revela mudanças no discurso e na ação.</a:t>
             </a:r>
             <a:endParaRPr lang="en-US" sz="1100" dirty="0"/>
           </a:p>
@@ -4761,7 +4801,7 @@
                 <a:ea typeface="Calibri" pitchFamily="34" charset="-122"/>
                 <a:cs typeface="Calibri" pitchFamily="34" charset="-120"/>
               </a:rPr>
-              <a:t>Wessels: listas, tabelas e gráficos comunicam histórias diferentes dos dados.</a:t>
+              <a:t>Listas, tabelas e gráficos comunicam histórias diferentes dos dados.</a:t>
             </a:r>
             <a:endParaRPr lang="en-US" sz="1100" dirty="0"/>
           </a:p>
@@ -4788,6 +4828,10 @@
           </a:solidFill>
           <a:ln/>
         </p:spPr>
+        <p:txBody>
+          <a:bodyPr/>
+          <a:p/>
+        </p:txBody>
       </p:sp>
       <p:sp>
         <p:nvSpPr>
@@ -5080,6 +5124,10 @@
           </a:solidFill>
           <a:ln/>
         </p:spPr>
+        <p:txBody>
+          <a:bodyPr/>
+          <a:p/>
+        </p:txBody>
       </p:sp>
       <p:sp>
         <p:nvSpPr>
@@ -5318,6 +5366,10 @@
           </a:solidFill>
           <a:ln/>
         </p:spPr>
+        <p:txBody>
+          <a:bodyPr/>
+          <a:p/>
+        </p:txBody>
       </p:sp>
       <p:sp>
         <p:nvSpPr>
@@ -5509,6 +5561,10 @@
           </a:solidFill>
           <a:ln/>
         </p:spPr>
+        <p:txBody>
+          <a:bodyPr/>
+          <a:p/>
+        </p:txBody>
       </p:sp>
       <p:sp>
         <p:nvSpPr>
@@ -5613,7 +5669,7 @@
                 <a:ea typeface="Calibri" pitchFamily="34" charset="-122"/>
                 <a:cs typeface="Calibri" pitchFamily="34" charset="-120"/>
               </a:rPr>
-              <a:t>Queiroz: múltiplas expressões exibem aspectos distintos do mesmo conceito.</a:t>
+              <a:t>Múltiplas expressões exibem aspectos distintos do mesmo conceito.</a:t>
             </a:r>
             <a:endParaRPr lang="en-US" sz="1100" dirty="0"/>
           </a:p>
@@ -5637,7 +5693,7 @@
                 <a:ea typeface="Calibri" pitchFamily="34" charset="-122"/>
                 <a:cs typeface="Calibri" pitchFamily="34" charset="-120"/>
               </a:rPr>
-              <a:t>Relato: solicitar explicação do raciocínio desenvolvido.</a:t>
+              <a:t>Solicitar explicação do raciocínio desenvolvido.</a:t>
             </a:r>
             <a:endParaRPr lang="en-US" sz="1100" dirty="0"/>
           </a:p>
@@ -5661,7 +5717,7 @@
                 <a:ea typeface="Calibri" pitchFamily="34" charset="-122"/>
                 <a:cs typeface="Calibri" pitchFamily="34" charset="-120"/>
               </a:rPr>
-              <a:t>Wessels: o contexto e o tipo de dado influenciam a representação escolhida.</a:t>
+              <a:t>O contexto e o tipo de dado influenciam a representação escolhida.</a:t>
             </a:r>
             <a:endParaRPr lang="en-US" sz="1100" dirty="0"/>
           </a:p>
@@ -5688,6 +5744,10 @@
           </a:solidFill>
           <a:ln/>
         </p:spPr>
+        <p:txBody>
+          <a:bodyPr/>
+          <a:p/>
+        </p:txBody>
       </p:sp>
       <p:sp>
         <p:nvSpPr>
@@ -5980,6 +6040,10 @@
           </a:solidFill>
           <a:ln/>
         </p:spPr>
+        <p:txBody>
+          <a:bodyPr/>
+          <a:p/>
+        </p:txBody>
       </p:sp>
       <p:sp>
         <p:nvSpPr>
@@ -6218,6 +6282,10 @@
           </a:solidFill>
           <a:ln/>
         </p:spPr>
+        <p:txBody>
+          <a:bodyPr/>
+          <a:p/>
+        </p:txBody>
       </p:sp>
       <p:sp>
         <p:nvSpPr>
@@ -6449,6 +6517,10 @@
           </a:solidFill>
           <a:ln/>
         </p:spPr>
+        <p:txBody>
+          <a:bodyPr/>
+          <a:p/>
+        </p:txBody>
       </p:sp>
       <p:sp>
         <p:nvSpPr>
@@ -6553,7 +6625,7 @@
                 <a:ea typeface="Calibri" pitchFamily="34" charset="-122"/>
                 <a:cs typeface="Calibri" pitchFamily="34" charset="-120"/>
               </a:rPr>
-              <a:t>Relato: reconhecer limites da ferramenta e do modelo.</a:t>
+              <a:t>Reconhecer limites da ferramenta e do modelo.</a:t>
             </a:r>
             <a:endParaRPr lang="en-US" sz="1100" dirty="0"/>
           </a:p>
@@ -6577,7 +6649,7 @@
                 <a:ea typeface="Calibri" pitchFamily="34" charset="-122"/>
                 <a:cs typeface="Calibri" pitchFamily="34" charset="-120"/>
               </a:rPr>
-              <a:t>Queiroz: a forma de representação influencia erros, antecipações e reorganizações.</a:t>
+              <a:t>A forma de representação influencia erros, antecipações e reorganizações.</a:t>
             </a:r>
             <a:endParaRPr lang="en-US" sz="1100" dirty="0"/>
           </a:p>
@@ -6601,7 +6673,7 @@
                 <a:ea typeface="Calibri" pitchFamily="34" charset="-122"/>
                 <a:cs typeface="Calibri" pitchFamily="34" charset="-120"/>
               </a:rPr>
-              <a:t>Wessels: níveis SOLO ajudam a observar respostas de menor a maior integração.</a:t>
+              <a:t>Níveis SOLO ajudam a observar respostas de menor a maior integração.</a:t>
             </a:r>
             <a:endParaRPr lang="en-US" sz="1100" dirty="0"/>
           </a:p>
@@ -6628,6 +6700,10 @@
           </a:solidFill>
           <a:ln/>
         </p:spPr>
+        <p:txBody>
+          <a:bodyPr/>
+          <a:p/>
+        </p:txBody>
       </p:sp>
       <p:sp>
         <p:nvSpPr>
@@ -6920,6 +6996,10 @@
           </a:solidFill>
           <a:ln/>
         </p:spPr>
+        <p:txBody>
+          <a:bodyPr/>
+          <a:p/>
+        </p:txBody>
       </p:sp>
       <p:sp>
         <p:nvSpPr>
@@ -7158,6 +7238,10 @@
           </a:solidFill>
           <a:ln/>
         </p:spPr>
+        <p:txBody>
+          <a:bodyPr/>
+          <a:p/>
+        </p:txBody>
       </p:sp>
       <p:sp>
         <p:nvSpPr>
@@ -7879,6 +7963,10 @@
           </a:solidFill>
           <a:ln/>
         </p:spPr>
+        <p:txBody>
+          <a:bodyPr/>
+          <a:p/>
+        </p:txBody>
       </p:sp>
       <p:sp>
         <p:nvSpPr>
@@ -7983,7 +8071,7 @@
                 <a:ea typeface="Calibri" pitchFamily="34" charset="-122"/>
                 <a:cs typeface="Calibri" pitchFamily="34" charset="-120"/>
               </a:rPr>
-              <a:t>Wessels: listas, tabelas e gráficos comunicam histórias diferentes dos dados.</a:t>
+              <a:t>Listas, tabelas e gráficos comunicam histórias diferentes dos dados.</a:t>
             </a:r>
             <a:endParaRPr lang="en-US" sz="1100" dirty="0"/>
           </a:p>
@@ -8007,7 +8095,7 @@
                 <a:ea typeface="Calibri" pitchFamily="34" charset="-122"/>
                 <a:cs typeface="Calibri" pitchFamily="34" charset="-120"/>
               </a:rPr>
-              <a:t>Queiroz: representações ampliam a percepção de propriedades e relações.</a:t>
+              <a:t>Representações ampliam a percepção de propriedades e relações.</a:t>
             </a:r>
             <a:endParaRPr lang="en-US" sz="1100" dirty="0"/>
           </a:p>
@@ -8031,7 +8119,7 @@
                 <a:ea typeface="Calibri" pitchFamily="34" charset="-122"/>
                 <a:cs typeface="Calibri" pitchFamily="34" charset="-120"/>
               </a:rPr>
-              <a:t>Relato: articular código, texto, tabela, gráfico e interpretação.</a:t>
+              <a:t>Articular código, texto, tabela, gráfico e interpretação.</a:t>
             </a:r>
             <a:endParaRPr lang="en-US" sz="1100" dirty="0"/>
           </a:p>
@@ -8058,6 +8146,10 @@
           </a:solidFill>
           <a:ln/>
         </p:spPr>
+        <p:txBody>
+          <a:bodyPr/>
+          <a:p/>
+        </p:txBody>
       </p:sp>
       <p:sp>
         <p:nvSpPr>
@@ -8350,6 +8442,10 @@
           </a:solidFill>
           <a:ln/>
         </p:spPr>
+        <p:txBody>
+          <a:bodyPr/>
+          <a:p/>
+        </p:txBody>
       </p:sp>
       <p:sp>
         <p:nvSpPr>
@@ -8588,6 +8684,10 @@
           </a:solidFill>
           <a:ln/>
         </p:spPr>
+        <p:txBody>
+          <a:bodyPr/>
+          <a:p/>
+        </p:txBody>
       </p:sp>
       <p:sp>
         <p:nvSpPr>
@@ -8963,6 +9063,10 @@
           </a:solidFill>
           <a:ln/>
         </p:spPr>
+        <p:txBody>
+          <a:bodyPr/>
+          <a:p/>
+        </p:txBody>
       </p:sp>
       <p:sp>
         <p:nvSpPr>
@@ -9067,7 +9171,7 @@
                 <a:ea typeface="Calibri" pitchFamily="34" charset="-122"/>
                 <a:cs typeface="Calibri" pitchFamily="34" charset="-120"/>
               </a:rPr>
-              <a:t>Relato: avaliar o percurso de pensamento, não apenas o código final.</a:t>
+              <a:t>Avaliar o percurso de pensamento, não apenas o código final.</a:t>
             </a:r>
             <a:endParaRPr lang="en-US" sz="1100" dirty="0"/>
           </a:p>
@@ -9091,7 +9195,7 @@
                 <a:ea typeface="Calibri" pitchFamily="34" charset="-122"/>
                 <a:cs typeface="Calibri" pitchFamily="34" charset="-120"/>
               </a:rPr>
-              <a:t>Queiroz: o percurso da tarefa revela mudanças no discurso e na ação.</a:t>
+              <a:t>O percurso da tarefa revela mudanças no discurso e na ação.</a:t>
             </a:r>
             <a:endParaRPr lang="en-US" sz="1100" dirty="0"/>
           </a:p>
@@ -9115,7 +9219,7 @@
                 <a:ea typeface="Calibri" pitchFamily="34" charset="-122"/>
                 <a:cs typeface="Calibri" pitchFamily="34" charset="-120"/>
               </a:rPr>
-              <a:t>Wessels: atividades planejadas desenvolvem representação e pensamento de ordem superior.</a:t>
+              <a:t>Atividades planejadas desenvolvem representação e pensamento de ordem superior.</a:t>
             </a:r>
             <a:endParaRPr lang="en-US" sz="1100" dirty="0"/>
           </a:p>
@@ -9142,6 +9246,10 @@
           </a:solidFill>
           <a:ln/>
         </p:spPr>
+        <p:txBody>
+          <a:bodyPr/>
+          <a:p/>
+        </p:txBody>
       </p:sp>
       <p:sp>
         <p:nvSpPr>
@@ -9434,6 +9542,10 @@
           </a:solidFill>
           <a:ln/>
         </p:spPr>
+        <p:txBody>
+          <a:bodyPr/>
+          <a:p/>
+        </p:txBody>
       </p:sp>
       <p:sp>
         <p:nvSpPr>
@@ -9672,6 +9784,10 @@
           </a:solidFill>
           <a:ln/>
         </p:spPr>
+        <p:txBody>
+          <a:bodyPr/>
+          <a:p/>
+        </p:txBody>
       </p:sp>
       <p:sp>
         <p:nvSpPr>
@@ -10047,6 +10163,10 @@
           </a:solidFill>
           <a:ln/>
         </p:spPr>
+        <p:txBody>
+          <a:bodyPr/>
+          <a:p/>
+        </p:txBody>
       </p:sp>
       <p:sp>
         <p:nvSpPr>
@@ -10151,7 +10271,7 @@
                 <a:ea typeface="Calibri" pitchFamily="34" charset="-122"/>
                 <a:cs typeface="Calibri" pitchFamily="34" charset="-120"/>
               </a:rPr>
-              <a:t>Relato: reconhecer limites da ferramenta e do modelo.</a:t>
+              <a:t>Reconhecer limites da ferramenta e do modelo.</a:t>
             </a:r>
             <a:endParaRPr lang="en-US" sz="1100" dirty="0"/>
           </a:p>
@@ -10175,7 +10295,7 @@
                 <a:ea typeface="Calibri" pitchFamily="34" charset="-122"/>
                 <a:cs typeface="Calibri" pitchFamily="34" charset="-120"/>
               </a:rPr>
-              <a:t>Queiroz: o resultado final não esgota a aprendizagem do conceito.</a:t>
+              <a:t>O resultado final não esgota a aprendizagem do conceito.</a:t>
             </a:r>
             <a:endParaRPr lang="en-US" sz="1100" dirty="0"/>
           </a:p>
@@ -10199,7 +10319,7 @@
                 <a:ea typeface="Calibri" pitchFamily="34" charset="-122"/>
                 <a:cs typeface="Calibri" pitchFamily="34" charset="-120"/>
               </a:rPr>
-              <a:t>Wessels: níveis SOLO ajudam a observar respostas de menor a maior integração.</a:t>
+              <a:t>Níveis SOLO ajudam a observar respostas de menor a maior integração.</a:t>
             </a:r>
             <a:endParaRPr lang="en-US" sz="1100" dirty="0"/>
           </a:p>
@@ -10226,6 +10346,10 @@
           </a:solidFill>
           <a:ln/>
         </p:spPr>
+        <p:txBody>
+          <a:bodyPr/>
+          <a:p/>
+        </p:txBody>
       </p:sp>
       <p:sp>
         <p:nvSpPr>
@@ -10773,6 +10897,10 @@
           </a:solidFill>
           <a:ln/>
         </p:spPr>
+        <p:txBody>
+          <a:bodyPr/>
+          <a:p/>
+        </p:txBody>
       </p:sp>
       <p:sp>
         <p:nvSpPr>
@@ -10944,6 +11072,10 @@
           </a:solidFill>
           <a:ln/>
         </p:spPr>
+        <p:txBody>
+          <a:bodyPr/>
+          <a:p/>
+        </p:txBody>
       </p:sp>
       <p:sp>
         <p:nvSpPr>
@@ -10966,6 +11098,10 @@
           </a:solidFill>
           <a:ln/>
         </p:spPr>
+        <p:txBody>
+          <a:bodyPr/>
+          <a:p/>
+        </p:txBody>
       </p:sp>
       <p:sp>
         <p:nvSpPr>
@@ -11064,6 +11200,10 @@
           </a:solidFill>
           <a:ln/>
         </p:spPr>
+        <p:txBody>
+          <a:bodyPr/>
+          <a:p/>
+        </p:txBody>
       </p:sp>
       <p:sp>
         <p:nvSpPr>
@@ -11204,6 +11344,10 @@
           </a:solidFill>
           <a:ln/>
         </p:spPr>
+        <p:txBody>
+          <a:bodyPr/>
+          <a:p/>
+        </p:txBody>
       </p:sp>
       <p:sp>
         <p:nvSpPr>
@@ -11344,6 +11488,10 @@
           </a:solidFill>
           <a:ln/>
         </p:spPr>
+        <p:txBody>
+          <a:bodyPr/>
+          <a:p/>
+        </p:txBody>
       </p:sp>
       <p:sp>
         <p:nvSpPr>
@@ -11486,6 +11634,10 @@
           </a:solidFill>
           <a:ln/>
         </p:spPr>
+        <p:txBody>
+          <a:bodyPr/>
+          <a:p/>
+        </p:txBody>
       </p:sp>
       <p:sp>
         <p:nvSpPr>
@@ -11547,6 +11699,10 @@
           </a:solidFill>
           <a:ln/>
         </p:spPr>
+        <p:txBody>
+          <a:bodyPr/>
+          <a:p/>
+        </p:txBody>
       </p:sp>
       <p:sp>
         <p:nvSpPr>
@@ -11567,6 +11723,10 @@
           </a:solidFill>
           <a:ln/>
         </p:spPr>
+        <p:txBody>
+          <a:bodyPr/>
+          <a:p/>
+        </p:txBody>
       </p:sp>
       <p:pic>
         <p:nvPicPr>
@@ -11877,6 +12037,10 @@
           </a:solidFill>
           <a:ln/>
         </p:spPr>
+        <p:txBody>
+          <a:bodyPr/>
+          <a:p/>
+        </p:txBody>
       </p:sp>
       <p:sp>
         <p:nvSpPr>
@@ -11978,6 +12142,10 @@
           </a:solidFill>
           <a:ln/>
         </p:spPr>
+        <p:txBody>
+          <a:bodyPr/>
+          <a:p/>
+        </p:txBody>
       </p:sp>
       <p:sp>
         <p:nvSpPr>
@@ -12079,6 +12247,10 @@
           </a:solidFill>
           <a:ln/>
         </p:spPr>
+        <p:txBody>
+          <a:bodyPr/>
+          <a:p/>
+        </p:txBody>
       </p:sp>
       <p:sp>
         <p:nvSpPr>
@@ -12180,6 +12352,10 @@
           </a:solidFill>
           <a:ln/>
         </p:spPr>
+        <p:txBody>
+          <a:bodyPr/>
+          <a:p/>
+        </p:txBody>
       </p:sp>
       <p:sp>
         <p:nvSpPr>
@@ -12281,6 +12457,10 @@
           </a:solidFill>
           <a:ln/>
         </p:spPr>
+        <p:txBody>
+          <a:bodyPr/>
+          <a:p/>
+        </p:txBody>
       </p:sp>
       <p:sp>
         <p:nvSpPr>
@@ -12382,6 +12562,10 @@
           </a:solidFill>
           <a:ln/>
         </p:spPr>
+        <p:txBody>
+          <a:bodyPr/>
+          <a:p/>
+        </p:txBody>
       </p:sp>
       <p:sp>
         <p:nvSpPr>
@@ -12485,6 +12669,10 @@
           </a:solidFill>
           <a:ln/>
         </p:spPr>
+        <p:txBody>
+          <a:bodyPr/>
+          <a:p/>
+        </p:txBody>
       </p:sp>
       <p:sp>
         <p:nvSpPr>
@@ -12734,6 +12922,10 @@
           </a:solidFill>
           <a:ln/>
         </p:spPr>
+        <p:txBody>
+          <a:bodyPr/>
+          <a:p/>
+        </p:txBody>
       </p:sp>
       <p:sp>
         <p:nvSpPr>
@@ -12865,6 +13057,10 @@
           </a:solidFill>
           <a:ln/>
         </p:spPr>
+        <p:txBody>
+          <a:bodyPr/>
+          <a:p/>
+        </p:txBody>
       </p:sp>
       <p:sp>
         <p:nvSpPr>
@@ -13223,6 +13419,10 @@
           </a:solidFill>
           <a:ln/>
         </p:spPr>
+        <p:txBody>
+          <a:bodyPr/>
+          <a:p/>
+        </p:txBody>
       </p:sp>
       <p:sp>
         <p:nvSpPr>
@@ -13354,6 +13554,10 @@
           </a:solidFill>
           <a:ln/>
         </p:spPr>
+        <p:txBody>
+          <a:bodyPr/>
+          <a:p/>
+        </p:txBody>
       </p:sp>
       <p:sp>
         <p:nvSpPr>
@@ -13485,6 +13689,10 @@
           </a:solidFill>
           <a:ln/>
         </p:spPr>
+        <p:txBody>
+          <a:bodyPr/>
+          <a:p/>
+        </p:txBody>
       </p:sp>
       <p:sp>
         <p:nvSpPr>
@@ -13695,6 +13903,10 @@
           </a:solidFill>
           <a:ln/>
         </p:spPr>
+        <p:txBody>
+          <a:bodyPr/>
+          <a:p/>
+        </p:txBody>
       </p:sp>
       <p:sp>
         <p:nvSpPr>
@@ -13795,6 +14007,10 @@
           </a:solidFill>
           <a:ln/>
         </p:spPr>
+        <p:txBody>
+          <a:bodyPr/>
+          <a:p/>
+        </p:txBody>
       </p:sp>
       <p:sp>
         <p:nvSpPr>
@@ -13902,6 +14118,10 @@
           </a:solidFill>
           <a:ln/>
         </p:spPr>
+        <p:txBody>
+          <a:bodyPr/>
+          <a:p/>
+        </p:txBody>
       </p:sp>
       <p:sp>
         <p:nvSpPr>
@@ -14158,6 +14378,10 @@
           </a:solidFill>
           <a:ln/>
         </p:spPr>
+        <p:txBody>
+          <a:bodyPr/>
+          <a:p/>
+        </p:txBody>
       </p:sp>
       <p:sp>
         <p:nvSpPr>
@@ -14180,6 +14404,10 @@
           </a:solidFill>
           <a:ln/>
         </p:spPr>
+        <p:txBody>
+          <a:bodyPr/>
+          <a:p/>
+        </p:txBody>
       </p:sp>
       <p:sp>
         <p:nvSpPr>
@@ -14360,6 +14588,10 @@
           </a:solidFill>
           <a:ln/>
         </p:spPr>
+        <p:txBody>
+          <a:bodyPr/>
+          <a:p/>
+        </p:txBody>
       </p:sp>
       <p:sp>
         <p:nvSpPr>
@@ -14691,6 +14923,10 @@
           </a:solidFill>
           <a:ln/>
         </p:spPr>
+        <p:txBody>
+          <a:bodyPr/>
+          <a:p/>
+        </p:txBody>
       </p:sp>
       <p:sp>
         <p:nvSpPr>
@@ -14929,6 +15165,10 @@
           </a:solidFill>
           <a:ln/>
         </p:spPr>
+        <p:txBody>
+          <a:bodyPr/>
+          <a:p/>
+        </p:txBody>
       </p:sp>
       <p:sp>
         <p:nvSpPr>
@@ -15517,6 +15757,10 @@
           </a:solidFill>
           <a:ln/>
         </p:spPr>
+        <p:txBody>
+          <a:bodyPr/>
+          <a:p/>
+        </p:txBody>
       </p:sp>
       <p:sp>
         <p:nvSpPr>
@@ -15621,7 +15865,7 @@
                 <a:ea typeface="Calibri" pitchFamily="34" charset="-122"/>
                 <a:cs typeface="Calibri" pitchFamily="34" charset="-120"/>
               </a:rPr>
-              <a:t>Relato: reconhecer limites da ferramenta e do modelo.</a:t>
+              <a:t>Reconhecer limites da ferramenta e do modelo.</a:t>
             </a:r>
             <a:endParaRPr lang="en-US" sz="1100" dirty="0"/>
           </a:p>
@@ -15645,7 +15889,7 @@
                 <a:ea typeface="Calibri" pitchFamily="34" charset="-122"/>
                 <a:cs typeface="Calibri" pitchFamily="34" charset="-120"/>
               </a:rPr>
-              <a:t>Queiroz: o resultado final não esgota a aprendizagem do conceito.</a:t>
+              <a:t>O resultado final não esgota a aprendizagem do conceito.</a:t>
             </a:r>
             <a:endParaRPr lang="en-US" sz="1100" dirty="0"/>
           </a:p>
@@ -15669,7 +15913,7 @@
                 <a:ea typeface="Calibri" pitchFamily="34" charset="-122"/>
                 <a:cs typeface="Calibri" pitchFamily="34" charset="-120"/>
               </a:rPr>
-              <a:t>Wessels: o contexto e o tipo de dado influenciam a representação escolhida.</a:t>
+              <a:t>O contexto e o tipo de dado influenciam a representação escolhida.</a:t>
             </a:r>
             <a:endParaRPr lang="en-US" sz="1100" dirty="0"/>
           </a:p>
@@ -15696,6 +15940,10 @@
           </a:solidFill>
           <a:ln/>
         </p:spPr>
+        <p:txBody>
+          <a:bodyPr/>
+          <a:p/>
+        </p:txBody>
       </p:sp>
       <p:sp>
         <p:nvSpPr>
@@ -15988,6 +16236,10 @@
           </a:solidFill>
           <a:ln/>
         </p:spPr>
+        <p:txBody>
+          <a:bodyPr/>
+          <a:p/>
+        </p:txBody>
       </p:sp>
       <p:sp>
         <p:nvSpPr>
@@ -16226,6 +16478,10 @@
           </a:solidFill>
           <a:ln/>
         </p:spPr>
+        <p:txBody>
+          <a:bodyPr/>
+          <a:p/>
+        </p:txBody>
       </p:sp>
       <p:sp>
         <p:nvSpPr>
@@ -16505,6 +16761,10 @@
           </a:solidFill>
           <a:ln/>
         </p:spPr>
+        <p:txBody>
+          <a:bodyPr/>
+          <a:p/>
+        </p:txBody>
       </p:sp>
       <p:sp>
         <p:nvSpPr>
@@ -16609,7 +16869,7 @@
                 <a:ea typeface="Calibri" pitchFamily="34" charset="-122"/>
                 <a:cs typeface="Calibri" pitchFamily="34" charset="-120"/>
               </a:rPr>
-              <a:t>Relato: reconhecer limites da ferramenta e do modelo.</a:t>
+              <a:t>Reconhecer limites da ferramenta e do modelo.</a:t>
             </a:r>
             <a:endParaRPr lang="en-US" sz="1100" dirty="0"/>
           </a:p>
@@ -16633,7 +16893,7 @@
                 <a:ea typeface="Calibri" pitchFamily="34" charset="-122"/>
                 <a:cs typeface="Calibri" pitchFamily="34" charset="-120"/>
               </a:rPr>
-              <a:t>Queiroz: a forma de representação influencia erros, antecipações e reorganizações.</a:t>
+              <a:t>A forma de representação influencia erros, antecipações e reorganizações.</a:t>
             </a:r>
             <a:endParaRPr lang="en-US" sz="1100" dirty="0"/>
           </a:p>
@@ -16657,7 +16917,7 @@
                 <a:ea typeface="Calibri" pitchFamily="34" charset="-122"/>
                 <a:cs typeface="Calibri" pitchFamily="34" charset="-120"/>
               </a:rPr>
-              <a:t>Wessels: o contexto e o tipo de dado influenciam a representação escolhida.</a:t>
+              <a:t>O contexto e o tipo de dado influenciam a representação escolhida.</a:t>
             </a:r>
             <a:endParaRPr lang="en-US" sz="1100" dirty="0"/>
           </a:p>
@@ -16684,6 +16944,10 @@
           </a:solidFill>
           <a:ln/>
         </p:spPr>
+        <p:txBody>
+          <a:bodyPr/>
+          <a:p/>
+        </p:txBody>
       </p:sp>
       <p:sp>
         <p:nvSpPr>
@@ -16976,6 +17240,10 @@
           </a:solidFill>
           <a:ln/>
         </p:spPr>
+        <p:txBody>
+          <a:bodyPr/>
+          <a:p/>
+        </p:txBody>
       </p:sp>
       <p:sp>
         <p:nvSpPr>
@@ -17214,6 +17482,10 @@
           </a:solidFill>
           <a:ln/>
         </p:spPr>
+        <p:txBody>
+          <a:bodyPr/>
+          <a:p/>
+        </p:txBody>
       </p:sp>
       <p:sp>
         <p:nvSpPr>
@@ -17575,6 +17847,10 @@
           </a:solidFill>
           <a:ln/>
         </p:spPr>
+        <p:txBody>
+          <a:bodyPr/>
+          <a:p/>
+        </p:txBody>
       </p:sp>
       <p:sp>
         <p:nvSpPr>
@@ -17679,7 +17955,7 @@
                 <a:ea typeface="Calibri" pitchFamily="34" charset="-122"/>
                 <a:cs typeface="Calibri" pitchFamily="34" charset="-120"/>
               </a:rPr>
-              <a:t>Queiroz: múltiplas expressões exibem aspectos distintos do mesmo conceito.</a:t>
+              <a:t>Múltiplas expressões exibem aspectos distintos do mesmo conceito.</a:t>
             </a:r>
             <a:endParaRPr lang="en-US" sz="1100" dirty="0"/>
           </a:p>
@@ -17703,7 +17979,7 @@
                 <a:ea typeface="Calibri" pitchFamily="34" charset="-122"/>
                 <a:cs typeface="Calibri" pitchFamily="34" charset="-120"/>
               </a:rPr>
-              <a:t>Relato: reconhecer limites da ferramenta e do modelo.</a:t>
+              <a:t>Reconhecer limites da ferramenta e do modelo.</a:t>
             </a:r>
             <a:endParaRPr lang="en-US" sz="1100" dirty="0"/>
           </a:p>
@@ -17727,7 +18003,7 @@
                 <a:ea typeface="Calibri" pitchFamily="34" charset="-122"/>
                 <a:cs typeface="Calibri" pitchFamily="34" charset="-120"/>
               </a:rPr>
-              <a:t>Wessels: listas, tabelas e gráficos comunicam histórias diferentes dos dados.</a:t>
+              <a:t>Listas, tabelas e gráficos comunicam histórias diferentes dos dados.</a:t>
             </a:r>
             <a:endParaRPr lang="en-US" sz="1100" dirty="0"/>
           </a:p>
@@ -17754,6 +18030,10 @@
           </a:solidFill>
           <a:ln/>
         </p:spPr>
+        <p:txBody>
+          <a:bodyPr/>
+          <a:p/>
+        </p:txBody>
       </p:sp>
       <p:sp>
         <p:nvSpPr>
